--- a/design-system/pptx/RECONECTA-modelo.pptx
+++ b/design-system/pptx/RECONECTA-modelo.pptx
@@ -1928,7 +1928,7 @@
           <a:lstStyle/>
           <a:p>
             <a:r>
-              <a:t>A agenda do milhão</a:t>
+              <a:t>A AGENDA DO MILHÃO</a:t>
             </a:r>
           </a:p>
         </p:txBody>
@@ -1988,7 +1988,7 @@
           <a:lstStyle/>
           <a:p>
             <a:r>
-              <a:t>O diagnóstico</a:t>
+              <a:t>O DIAGNÓSTICO</a:t>
             </a:r>
           </a:p>
         </p:txBody>
@@ -2009,7 +2009,7 @@
           <a:lstStyle/>
           <a:p>
             <a:r>
-              <a:t>Parte 01</a:t>
+              <a:t>PARTE 01</a:t>
             </a:r>
           </a:p>
         </p:txBody>
@@ -2048,7 +2048,7 @@
           <a:lstStyle/>
           <a:p>
             <a:r>
-              <a:t>O que trava a agenda não é captação</a:t>
+              <a:t>O QUE TRAVA A AGENDA NÃO É CAPTAÇÃO</a:t>
             </a:r>
           </a:p>
         </p:txBody>
@@ -2087,7 +2087,7 @@
           <a:lstStyle/>
           <a:p>
             <a:r>
-              <a:t>Onde a conta vaza</a:t>
+              <a:t>ONDE A CONTA VAZA</a:t>
             </a:r>
           </a:p>
         </p:txBody>
@@ -2168,7 +2168,7 @@
           <a:lstStyle/>
           <a:p>
             <a:r>
-              <a:t>As três engrenagens</a:t>
+              <a:t>AS TRÊS ENGRENAGENS</a:t>
             </a:r>
           </a:p>
         </p:txBody>
@@ -2238,7 +2238,7 @@
           <a:lstStyle/>
           <a:p>
             <a:r>
-              <a:t>Como a agenda muda</a:t>
+              <a:t>COMO A AGENDA MUDA</a:t>
             </a:r>
           </a:p>
         </p:txBody>
@@ -2259,7 +2259,7 @@
           <a:lstStyle/>
           <a:p>
             <a:r>
-              <a:t>Antes</a:t>
+              <a:t>ANTES</a:t>
             </a:r>
           </a:p>
         </p:txBody>
@@ -2301,7 +2301,7 @@
           <a:lstStyle/>
           <a:p>
             <a:r>
-              <a:t>Depois</a:t>
+              <a:t>DEPOIS</a:t>
             </a:r>
           </a:p>
         </p:txBody>
@@ -2373,7 +2373,7 @@
           <a:lstStyle/>
           <a:p>
             <a:r>
-              <a:t>Isso acontece na cadeira</a:t>
+              <a:t>ISSO ACONTECE NA CADEIRA</a:t>
             </a:r>
           </a:p>
         </p:txBody>
@@ -2433,7 +2433,7 @@
           <a:lstStyle/>
           <a:p>
             <a:r>
-              <a:t>Comece pelo retorno</a:t>
+              <a:t>COMECE PELO RETORNO</a:t>
             </a:r>
           </a:p>
         </p:txBody>
@@ -2454,7 +2454,7 @@
           <a:lstStyle/>
           <a:p>
             <a:r>
-              <a:t>Próximo passo  /  →</a:t>
+              <a:t>PRÓXIMO PASSO  /  →</a:t>
             </a:r>
           </a:p>
         </p:txBody>
